--- a/FMN_Inventory_Triage_Presentation.pptx
+++ b/FMN_Inventory_Triage_Presentation.pptx
@@ -4,6 +4,9 @@
   <p:sldMasterIdLst>
     <p:sldMasterId id="2147483648" r:id="rId1"/>
   </p:sldMasterIdLst>
+  <p:notesMasterIdLst>
+    <p:notesMasterId r:id="rId9"/>
+  </p:notesMasterIdLst>
   <p:sldIdLst>
     <p:sldId id="256" r:id="rId2"/>
     <p:sldId id="257" r:id="rId3"/>
@@ -13,9 +16,6 @@
     <p:sldId id="261" r:id="rId7"/>
     <p:sldId id="262" r:id="rId8"/>
   </p:sldIdLst>
-  <p:notesMasterIdLst>
-    <p:notesMasterId r:id="rId9"/>
-  </p:notesMasterIdLst>
   <p:sldSz cx="12192000" cy="6858000"/>
   <p:notesSz cx="6858000" cy="12192000"/>
   <p:defaultTextStyle>
@@ -110,13 +110,20 @@
       </a:defRPr>
     </a:lvl9pPr>
   </p:defaultTextStyle>
+  <p:extLst>
+    <p:ext uri="{EFAFB233-063F-42B5-8137-9DF3F51BA10A}">
+      <p15:sldGuideLst xmlns:p15="http://schemas.microsoft.com/office/powerpoint/2012/main"/>
+    </p:ext>
+  </p:extLst>
 </p:presentation>
 </file>
 
 <file path=ppt/charts/chart1.xml><?xml version="1.0" encoding="utf-8"?>
-<c:chartSpace xmlns:c="http://schemas.openxmlformats.org/drawingml/2006/chart" xmlns:a="http://schemas.openxmlformats.org/drawingml/2006/main" xmlns:r="http://schemas.openxmlformats.org/officeDocument/2006/relationships">
+<c:chartSpace xmlns:c="http://schemas.openxmlformats.org/drawingml/2006/chart" xmlns:a="http://schemas.openxmlformats.org/drawingml/2006/main" xmlns:r="http://schemas.openxmlformats.org/officeDocument/2006/relationships" xmlns:c16r2="http://schemas.microsoft.com/office/drawing/2015/06/chart">
   <c:date1904 val="0"/>
+  <c:lang val="en-US"/>
   <c:roundedCorners val="1"/>
+  <c:style val="2"/>
   <c:chart>
     <c:title>
       <c:tx>
@@ -133,7 +140,7 @@
               </a:defRPr>
             </a:pPr>
             <a:r>
-              <a:rPr sz="1400" b="0" i="0" u="none" strike="noStrike">
+              <a:rPr lang="en-US" sz="1400" b="0" i="0" u="none" strike="noStrike">
                 <a:solidFill>
                   <a:srgbClr val="2B2118"/>
                 </a:solidFill>
@@ -144,7 +151,6 @@
           </a:p>
         </c:rich>
       </c:tx>
-      <c:layout/>
       <c:overlay val="0"/>
     </c:title>
     <c:autoTitleDeleted val="0"/>
@@ -175,51 +181,25 @@
             <a:effectLst/>
           </c:spPr>
           <c:invertIfNegative val="0"/>
-          <c:dLbls>
-            <c:numFmt formatCode="0.0" sourceLinked="0"/>
-            <c:txPr>
-              <a:bodyPr/>
-              <a:lstStyle/>
-              <a:p>
-                <a:pPr>
-                  <a:defRPr b="0" i="0" strike="noStrike" sz="1200" u="none">
-                    <a:solidFill>
-                      <a:srgbClr val="2B2118"/>
-                    </a:solidFill>
-                    <a:latin typeface="Arial"/>
-                  </a:defRPr>
-                </a:pPr>
-              </a:p>
-            </c:txPr>
-            <c:showLegendKey val="0"/>
-            <c:showVal val="1"/>
-            <c:showCatName val="0"/>
-            <c:showSerName val="0"/>
-            <c:showPercent val="0"/>
-            <c:showBubbleSize val="0"/>
-            <c:showLeaderLines val="0"/>
-          </c:dLbls>
           <c:dPt>
             <c:idx val="0"/>
             <c:invertIfNegative val="0"/>
             <c:bubble3D val="0"/>
-            <c:spPr>
-              <a:solidFill>
-                <a:srgbClr val="3E5B6D"/>
-              </a:solidFill>
-              <a:effectLst/>
-            </c:spPr>
+            <c:extLst>
+              <c:ext xmlns:c16="http://schemas.microsoft.com/office/drawing/2014/chart" uri="{C3380CC4-5D6E-409C-BE32-E72D297353CC}">
+                <c16:uniqueId val="{00000001-6ED6-44D1-9CCB-84A791A971AB}"/>
+              </c:ext>
+            </c:extLst>
           </c:dPt>
           <c:dPt>
             <c:idx val="1"/>
             <c:invertIfNegative val="0"/>
             <c:bubble3D val="0"/>
-            <c:spPr>
-              <a:solidFill>
-                <a:srgbClr val="3E5B6D"/>
-              </a:solidFill>
-              <a:effectLst/>
-            </c:spPr>
+            <c:extLst>
+              <c:ext xmlns:c16="http://schemas.microsoft.com/office/drawing/2014/chart" uri="{C3380CC4-5D6E-409C-BE32-E72D297353CC}">
+                <c16:uniqueId val="{00000003-6ED6-44D1-9CCB-84A791A971AB}"/>
+              </c:ext>
+            </c:extLst>
           </c:dPt>
           <c:dPt>
             <c:idx val="2"/>
@@ -231,6 +211,11 @@
               </a:solidFill>
               <a:effectLst/>
             </c:spPr>
+            <c:extLst>
+              <c:ext xmlns:c16="http://schemas.microsoft.com/office/drawing/2014/chart" uri="{C3380CC4-5D6E-409C-BE32-E72D297353CC}">
+                <c16:uniqueId val="{00000005-6ED6-44D1-9CCB-84A791A971AB}"/>
+              </c:ext>
+            </c:extLst>
           </c:dPt>
           <c:dPt>
             <c:idx val="3"/>
@@ -242,32 +227,72 @@
               </a:solidFill>
               <a:effectLst/>
             </c:spPr>
+            <c:extLst>
+              <c:ext xmlns:c16="http://schemas.microsoft.com/office/drawing/2014/chart" uri="{C3380CC4-5D6E-409C-BE32-E72D297353CC}">
+                <c16:uniqueId val="{00000007-6ED6-44D1-9CCB-84A791A971AB}"/>
+              </c:ext>
+            </c:extLst>
           </c:dPt>
+          <c:dLbls>
+            <c:numFmt formatCode="0.0" sourceLinked="0"/>
+            <c:spPr>
+              <a:noFill/>
+              <a:ln>
+                <a:noFill/>
+              </a:ln>
+              <a:effectLst/>
+            </c:spPr>
+            <c:txPr>
+              <a:bodyPr/>
+              <a:lstStyle/>
+              <a:p>
+                <a:pPr>
+                  <a:defRPr sz="1200" b="0" i="0" u="none" strike="noStrike">
+                    <a:solidFill>
+                      <a:srgbClr val="2B2118"/>
+                    </a:solidFill>
+                    <a:latin typeface="Arial"/>
+                  </a:defRPr>
+                </a:pPr>
+                <a:endParaRPr lang="en-US"/>
+              </a:p>
+            </c:txPr>
+            <c:showLegendKey val="0"/>
+            <c:showVal val="1"/>
+            <c:showCatName val="0"/>
+            <c:showSerName val="0"/>
+            <c:showPercent val="0"/>
+            <c:showBubbleSize val="0"/>
+            <c:showLeaderLines val="0"/>
+            <c:extLst>
+              <c:ext xmlns:c15="http://schemas.microsoft.com/office/drawing/2012/chart" uri="{CE6537A1-D6FC-4f65-9D91-7224C49458BB}">
+                <c15:showLeaderLines val="0"/>
+              </c:ext>
+            </c:extLst>
+          </c:dLbls>
           <c:cat>
-            <c:multiLvlStrRef>
+            <c:strRef>
               <c:f>Sheet1!$A$2:$A$5</c:f>
-              <c:multiLvlStrCache>
+              <c:strCache>
                 <c:ptCount val="4"/>
-                <c:lvl>
-                  <c:pt idx="0">
-                    <c:v>LightGBM
+                <c:pt idx="0">
+                  <c:v>LightGBM
 (tuned)</c:v>
-                  </c:pt>
-                  <c:pt idx="1">
-                    <c:v>CatBoost
+                </c:pt>
+                <c:pt idx="1">
+                  <c:v>CatBoost
 (tuned)</c:v>
-                  </c:pt>
-                  <c:pt idx="2">
-                    <c:v>XGBoost
+                </c:pt>
+                <c:pt idx="2">
+                  <c:v>XGBoost
 (default)</c:v>
-                  </c:pt>
-                  <c:pt idx="3">
-                    <c:v>ETS
+                </c:pt>
+                <c:pt idx="3">
+                  <c:v>ETS
 (classical baseline)</c:v>
-                  </c:pt>
-                </c:lvl>
-              </c:multiLvlStrCache>
-            </c:multiLvlStrRef>
+                </c:pt>
+              </c:strCache>
+            </c:strRef>
           </c:cat>
           <c:val>
             <c:numRef>
@@ -276,10 +301,10 @@
                 <c:formatCode>General</c:formatCode>
                 <c:ptCount val="4"/>
                 <c:pt idx="0">
-                  <c:v>17.9</c:v>
+                  <c:v>17.899999999999999</c:v>
                 </c:pt>
                 <c:pt idx="1">
-                  <c:v>17.9</c:v>
+                  <c:v>17.899999999999999</c:v>
                 </c:pt>
                 <c:pt idx="2">
                   <c:v>19.2</c:v>
@@ -290,36 +315,23 @@
               </c:numCache>
             </c:numRef>
           </c:val>
+          <c:extLst>
+            <c:ext xmlns:c16="http://schemas.microsoft.com/office/drawing/2014/chart" uri="{C3380CC4-5D6E-409C-BE32-E72D297353CC}">
+              <c16:uniqueId val="{00000008-6ED6-44D1-9CCB-84A791A971AB}"/>
+            </c:ext>
+          </c:extLst>
         </c:ser>
         <c:dLbls>
-          <c:numFmt formatCode="0.0" sourceLinked="0"/>
-          <c:txPr>
-            <a:bodyPr/>
-            <a:lstStyle/>
-            <a:p>
-              <a:pPr>
-                <a:defRPr b="0" i="0" strike="noStrike" sz="1200" u="none">
-                  <a:solidFill>
-                    <a:srgbClr val="2B2118"/>
-                  </a:solidFill>
-                  <a:latin typeface="Arial"/>
-                </a:defRPr>
-              </a:pPr>
-            </a:p>
-          </c:txPr>
           <c:showLegendKey val="0"/>
           <c:showVal val="1"/>
           <c:showCatName val="0"/>
           <c:showSerName val="0"/>
           <c:showPercent val="0"/>
           <c:showBubbleSize val="0"/>
-          <c:showLeaderLines val="0"/>
         </c:dLbls>
         <c:gapWidth val="150"/>
-        <c:overlap val="0"/>
         <c:axId val="2094734554"/>
         <c:axId val="2094734552"/>
-        <c:axId val="2094734556"/>
       </c:barChart>
       <c:catAx>
         <c:axId val="2094734554"/>
@@ -360,6 +372,7 @@
         <c:crosses val="autoZero"/>
         <c:auto val="1"/>
         <c:lblAlgn val="ctr"/>
+        <c:lblOffset val="100"/>
         <c:noMultiLvlLbl val="1"/>
       </c:catAx>
       <c:valAx>
@@ -397,7 +410,7 @@
                   </a:defRPr>
                 </a:pPr>
                 <a:r>
-                  <a:rPr b="0" i="0" u="none" strike="noStrike">
+                  <a:rPr lang="en-US" b="0" i="0" u="none" strike="noStrike">
                     <a:solidFill>
                       <a:srgbClr val="000000"/>
                     </a:solidFill>
@@ -408,7 +421,6 @@
               </a:p>
             </c:rich>
           </c:tx>
-          <c:layout/>
           <c:overlay val="0"/>
         </c:title>
         <c:numFmt formatCode="General" sourceLinked="0"/>
@@ -453,6 +465,7 @@
     </c:plotArea>
     <c:plotVisOnly val="1"/>
     <c:dispBlanksAs val="span"/>
+    <c:showDLblsOverMax val="1"/>
   </c:chart>
   <c:spPr>
     <a:noFill/>
@@ -489,234 +502,10 @@
           <a:chExt cx="0" cy="0"/>
         </a:xfrm>
       </p:grpSpPr>
-      <p:sp>
-        <p:nvSpPr>
-          <p:cNvPr id="2" name="Header Placeholder 1"/>
-          <p:cNvSpPr>
-            <a:spLocks noGrp="1"/>
-          </p:cNvSpPr>
-          <p:nvPr>
-            <p:ph type="hdr" sz="quarter"/>
-          </p:nvPr>
-        </p:nvSpPr>
-        <p:spPr>
-          <a:xfrm>
-            <a:off x="0" y="0"/>
-            <a:ext cx="2971800" cy="458788"/>
-          </a:xfrm>
-          <a:prstGeom prst="rect">
-            <a:avLst/>
-          </a:prstGeom>
-        </p:spPr>
-        <p:txBody>
-          <a:bodyPr vert="horz" lIns="91440" tIns="45720" rIns="91440" bIns="45720" rtlCol="0"/>
-          <a:lstStyle>
-            <a:lvl1pPr algn="l">
-              <a:defRPr sz="1200"/>
-            </a:lvl1pPr>
-          </a:lstStyle>
-          <a:p>
-            <a:endParaRPr lang="en-US"/>
-          </a:p>
-        </p:txBody>
-      </p:sp>
-      <p:sp>
-        <p:nvSpPr>
-          <p:cNvPr id="3" name="Date Placeholder 2"/>
-          <p:cNvSpPr>
-            <a:spLocks noGrp="1"/>
-          </p:cNvSpPr>
-          <p:nvPr>
-            <p:ph type="dt" idx="1"/>
-          </p:nvPr>
-        </p:nvSpPr>
-        <p:spPr>
-          <a:xfrm>
-            <a:off x="3884613" y="0"/>
-            <a:ext cx="2971800" cy="458788"/>
-          </a:xfrm>
-          <a:prstGeom prst="rect">
-            <a:avLst/>
-          </a:prstGeom>
-        </p:spPr>
-        <p:txBody>
-          <a:bodyPr vert="horz" lIns="91440" tIns="45720" rIns="91440" bIns="45720" rtlCol="0"/>
-          <a:lstStyle>
-            <a:lvl1pPr algn="r">
-              <a:defRPr sz="1200"/>
-            </a:lvl1pPr>
-          </a:lstStyle>
-          <a:p>
-            <a:fld id="{5282F153-3F37-0F45-9E97-73ACFA13230C}" type="datetimeFigureOut">
-              <a:rPr lang="en-US"/>
-              <a:t>7/23/19</a:t>
-            </a:fld>
-            <a:endParaRPr lang="en-US"/>
-          </a:p>
-        </p:txBody>
-      </p:sp>
-      <p:sp>
-        <p:nvSpPr>
-          <p:cNvPr id="4" name="Slide Image Placeholder 3"/>
-          <p:cNvSpPr>
-            <a:spLocks noGrp="1" noRot="1" noChangeAspect="1"/>
-          </p:cNvSpPr>
-          <p:nvPr>
-            <p:ph type="sldImg" idx="2"/>
-          </p:nvPr>
-        </p:nvSpPr>
-        <p:spPr>
-          <a:xfrm>
-            <a:off x="685800" y="1143000"/>
-            <a:ext cx="5486400" cy="3086100"/>
-          </a:xfrm>
-          <a:prstGeom prst="rect">
-            <a:avLst/>
-          </a:prstGeom>
-          <a:noFill/>
-          <a:ln w="12700">
-            <a:solidFill>
-              <a:prstClr val="black"/>
-            </a:solidFill>
-          </a:ln>
-        </p:spPr>
-        <p:txBody>
-          <a:bodyPr vert="horz" lIns="91440" tIns="45720" rIns="91440" bIns="45720" rtlCol="0" anchor="ctr"/>
-          <a:lstStyle/>
-          <a:p>
-            <a:endParaRPr lang="en-US"/>
-          </a:p>
-        </p:txBody>
-      </p:sp>
-      <p:sp>
-        <p:nvSpPr>
-          <p:cNvPr id="5" name="Notes Placeholder 4"/>
-          <p:cNvSpPr>
-            <a:spLocks noGrp="1"/>
-          </p:cNvSpPr>
-          <p:nvPr>
-            <p:ph type="body" sz="quarter" idx="3"/>
-          </p:nvPr>
-        </p:nvSpPr>
-        <p:spPr>
-          <a:xfrm>
-            <a:off x="685800" y="4400550"/>
-            <a:ext cx="5486400" cy="3600450"/>
-          </a:xfrm>
-          <a:prstGeom prst="rect">
-            <a:avLst/>
-          </a:prstGeom>
-        </p:spPr>
-        <p:txBody>
-          <a:bodyPr vert="horz" lIns="91440" tIns="45720" rIns="91440" bIns="45720" rtlCol="0"/>
-          <a:lstStyle/>
-          <a:p>
-            <a:pPr lvl="0"/>
-            <a:r>
-              <a:rPr lang="en-US"/>
-              <a:t>Click to edit Master text styles</a:t>
-            </a:r>
-          </a:p>
-          <a:p>
-            <a:pPr lvl="1"/>
-            <a:r>
-              <a:rPr lang="en-US"/>
-              <a:t>Second level</a:t>
-            </a:r>
-          </a:p>
-          <a:p>
-            <a:pPr lvl="2"/>
-            <a:r>
-              <a:rPr lang="en-US"/>
-              <a:t>Third level</a:t>
-            </a:r>
-          </a:p>
-          <a:p>
-            <a:pPr lvl="3"/>
-            <a:r>
-              <a:rPr lang="en-US"/>
-              <a:t>Fourth level</a:t>
-            </a:r>
-          </a:p>
-          <a:p>
-            <a:pPr lvl="4"/>
-            <a:r>
-              <a:rPr lang="en-US"/>
-              <a:t>Fifth level</a:t>
-            </a:r>
-          </a:p>
-        </p:txBody>
-      </p:sp>
-      <p:sp>
-        <p:nvSpPr>
-          <p:cNvPr id="6" name="Footer Placeholder 5"/>
-          <p:cNvSpPr>
-            <a:spLocks noGrp="1"/>
-          </p:cNvSpPr>
-          <p:nvPr>
-            <p:ph type="ftr" sz="quarter" idx="4"/>
-          </p:nvPr>
-        </p:nvSpPr>
-        <p:spPr>
-          <a:xfrm>
-            <a:off x="0" y="8685213"/>
-            <a:ext cx="2971800" cy="458787"/>
-          </a:xfrm>
-          <a:prstGeom prst="rect">
-            <a:avLst/>
-          </a:prstGeom>
-        </p:spPr>
-        <p:txBody>
-          <a:bodyPr vert="horz" lIns="91440" tIns="45720" rIns="91440" bIns="45720" rtlCol="0" anchor="b"/>
-          <a:lstStyle>
-            <a:lvl1pPr algn="l">
-              <a:defRPr sz="1200"/>
-            </a:lvl1pPr>
-          </a:lstStyle>
-          <a:p>
-            <a:endParaRPr lang="en-US"/>
-          </a:p>
-        </p:txBody>
-      </p:sp>
-      <p:sp>
-        <p:nvSpPr>
-          <p:cNvPr id="7" name="Slide Number Placeholder 6"/>
-          <p:cNvSpPr>
-            <a:spLocks noGrp="1"/>
-          </p:cNvSpPr>
-          <p:nvPr>
-            <p:ph type="sldNum" sz="quarter" idx="5"/>
-          </p:nvPr>
-        </p:nvSpPr>
-        <p:spPr>
-          <a:xfrm>
-            <a:off x="3884613" y="8685213"/>
-            <a:ext cx="2971800" cy="458787"/>
-          </a:xfrm>
-          <a:prstGeom prst="rect">
-            <a:avLst/>
-          </a:prstGeom>
-        </p:spPr>
-        <p:txBody>
-          <a:bodyPr vert="horz" lIns="91440" tIns="45720" rIns="91440" bIns="45720" rtlCol="0" anchor="b"/>
-          <a:lstStyle>
-            <a:lvl1pPr algn="r">
-              <a:defRPr sz="1200"/>
-            </a:lvl1pPr>
-          </a:lstStyle>
-          <a:p>
-            <a:fld id="{CE5E9CC1-C706-0F49-92D6-E571CC5EEA8F}" type="slidenum">
-              <a:rPr lang="en-US"/>
-              <a:t>‹#›</a:t>
-            </a:fld>
-            <a:endParaRPr lang="en-US"/>
-          </a:p>
-        </p:txBody>
-      </p:sp>
     </p:spTree>
     <p:extLst>
       <p:ext uri="{BB962C8B-B14F-4D97-AF65-F5344CB8AC3E}">
-        <p14:creationId xmlns:p14="http://schemas.microsoft.com/office/powerpoint/2010/main" val="1024086991"/>
+        <p14:creationId xmlns:p14="http://schemas.microsoft.com/office/powerpoint/2010/main" val="1067366874"/>
       </p:ext>
     </p:extLst>
   </p:cSld>
@@ -860,10 +649,6 @@
           <a:bodyPr/>
           <a:lstStyle/>
           <a:p>
-            <a:r>
-              <a:rPr lang="en-US" dirty="0"/>
-              <a:t/>
-            </a:r>
             <a:endParaRPr lang="en-US" dirty="0"/>
           </a:p>
         </p:txBody>
@@ -948,10 +733,6 @@
           <a:bodyPr/>
           <a:lstStyle/>
           <a:p>
-            <a:r>
-              <a:rPr lang="en-US" dirty="0"/>
-              <a:t/>
-            </a:r>
             <a:endParaRPr lang="en-US" dirty="0"/>
           </a:p>
         </p:txBody>
@@ -1036,10 +817,6 @@
           <a:bodyPr/>
           <a:lstStyle/>
           <a:p>
-            <a:r>
-              <a:rPr lang="en-US" dirty="0"/>
-              <a:t/>
-            </a:r>
             <a:endParaRPr lang="en-US" dirty="0"/>
           </a:p>
         </p:txBody>
@@ -1124,10 +901,6 @@
           <a:bodyPr/>
           <a:lstStyle/>
           <a:p>
-            <a:r>
-              <a:rPr lang="en-US" dirty="0"/>
-              <a:t/>
-            </a:r>
             <a:endParaRPr lang="en-US" dirty="0"/>
           </a:p>
         </p:txBody>
@@ -1212,10 +985,6 @@
           <a:bodyPr/>
           <a:lstStyle/>
           <a:p>
-            <a:r>
-              <a:rPr lang="en-US" dirty="0"/>
-              <a:t/>
-            </a:r>
             <a:endParaRPr lang="en-US" dirty="0"/>
           </a:p>
         </p:txBody>
@@ -1300,10 +1069,6 @@
           <a:bodyPr/>
           <a:lstStyle/>
           <a:p>
-            <a:r>
-              <a:rPr lang="en-US" dirty="0"/>
-              <a:t/>
-            </a:r>
             <a:endParaRPr lang="en-US" dirty="0"/>
           </a:p>
         </p:txBody>
@@ -1388,10 +1153,6 @@
           <a:bodyPr/>
           <a:lstStyle/>
           <a:p>
-            <a:r>
-              <a:rPr lang="en-US" dirty="0"/>
-              <a:t/>
-            </a:r>
             <a:endParaRPr lang="en-US" dirty="0"/>
           </a:p>
         </p:txBody>
@@ -1465,6 +1226,11 @@
 <file path=ppt/slideMasters/slideMaster1.xml><?xml version="1.0" encoding="utf-8"?>
 <p:sldMaster xmlns:a="http://schemas.openxmlformats.org/drawingml/2006/main" xmlns:r="http://schemas.openxmlformats.org/officeDocument/2006/relationships" xmlns:p="http://schemas.openxmlformats.org/presentationml/2006/main">
   <p:cSld>
+    <p:bg>
+      <p:bgRef idx="1001">
+        <a:schemeClr val="bg1"/>
+      </p:bgRef>
+    </p:bg>
     <p:spTree>
       <p:nvGrpSpPr>
         <p:cNvPr id="1" name=""/>
@@ -1747,6 +1513,7 @@
         <a:solidFill>
           <a:srgbClr val="2B2118"/>
         </a:solidFill>
+        <a:effectLst/>
       </p:bgPr>
     </p:bg>
     <p:spTree>
@@ -1782,6 +1549,13 @@
           </a:solidFill>
           <a:ln/>
         </p:spPr>
+        <p:txBody>
+          <a:bodyPr/>
+          <a:lstStyle/>
+          <a:p>
+            <a:endParaRPr lang="en-US"/>
+          </a:p>
+        </p:txBody>
       </p:sp>
       <p:sp>
         <p:nvSpPr>
@@ -1804,6 +1578,13 @@
           </a:solidFill>
           <a:ln/>
         </p:spPr>
+        <p:txBody>
+          <a:bodyPr/>
+          <a:lstStyle/>
+          <a:p>
+            <a:endParaRPr lang="en-US"/>
+          </a:p>
+        </p:txBody>
       </p:sp>
       <p:sp>
         <p:nvSpPr>
@@ -1826,11 +1607,11 @@
           <a:bodyPr wrap="square" lIns="0" tIns="0" rIns="0" bIns="0" rtlCol="0" anchor="ctr"/>
           <a:lstStyle/>
           <a:p>
-            <a:pPr indent="0" marL="0">
-              <a:buNone/>
-            </a:pPr>
-            <a:r>
-              <a:rPr lang="en-US" sz="1300" b="1" spc="200" kern="0" dirty="0">
+            <a:pPr marL="0" indent="0">
+              <a:buNone/>
+            </a:pPr>
+            <a:r>
+              <a:rPr lang="en-US" sz="1300" b="1" kern="0" spc="200" dirty="0">
                 <a:solidFill>
                   <a:srgbClr val="C89B3C"/>
                 </a:solidFill>
@@ -1865,7 +1646,7 @@
           <a:bodyPr wrap="square" lIns="0" tIns="0" rIns="0" bIns="0" rtlCol="0" anchor="ctr"/>
           <a:lstStyle/>
           <a:p>
-            <a:pPr indent="0" marL="0">
+            <a:pPr marL="0" indent="0">
               <a:buNone/>
             </a:pPr>
             <a:r>
@@ -1877,7 +1658,7 @@
                 <a:ea typeface="Cambria" pitchFamily="34" charset="-122"/>
                 <a:cs typeface="Cambria" pitchFamily="34" charset="-120"/>
               </a:rPr>
-              <a:t>The Inventory Triage Engine</a:t>
+              <a:t>The Inventory Triage</a:t>
             </a:r>
             <a:endParaRPr lang="en-US" sz="4400" dirty="0"/>
           </a:p>
@@ -1904,7 +1685,7 @@
           <a:bodyPr wrap="square" lIns="0" tIns="0" rIns="0" bIns="0" rtlCol="0" anchor="ctr"/>
           <a:lstStyle/>
           <a:p>
-            <a:pPr indent="0" marL="0">
+            <a:pPr marL="0" indent="0">
               <a:buNone/>
             </a:pPr>
             <a:r>
@@ -1919,45 +1700,6 @@
               <a:t>Forecasting demand and flagging risk per SKU — before it becomes a problem.</a:t>
             </a:r>
             <a:endParaRPr lang="en-US" sz="1800" dirty="0"/>
-          </a:p>
-        </p:txBody>
-      </p:sp>
-      <p:sp>
-        <p:nvSpPr>
-          <p:cNvPr id="7" name="Text 5"/>
-          <p:cNvSpPr txBox="1"/>
-          <p:nvPr/>
-        </p:nvSpPr>
-        <p:spPr>
-          <a:xfrm>
-            <a:off x="640080" y="4709160"/>
-            <a:ext cx="7315200" cy="365760"/>
-          </a:xfrm>
-          <a:prstGeom prst="rect">
-            <a:avLst/>
-          </a:prstGeom>
-          <a:noFill/>
-          <a:ln/>
-        </p:spPr>
-        <p:txBody>
-          <a:bodyPr wrap="square" lIns="0" tIns="0" rIns="0" bIns="0" rtlCol="0" anchor="ctr"/>
-          <a:lstStyle/>
-          <a:p>
-            <a:pPr indent="0" marL="0">
-              <a:buNone/>
-            </a:pPr>
-            <a:r>
-              <a:rPr lang="en-US" sz="1200" dirty="0">
-                <a:solidFill>
-                  <a:srgbClr val="9C9184"/>
-                </a:solidFill>
-                <a:latin typeface="Calibri" pitchFamily="34" charset="0"/>
-                <a:ea typeface="Calibri" pitchFamily="34" charset="-122"/>
-                <a:cs typeface="Calibri" pitchFamily="34" charset="-120"/>
-              </a:rPr>
-              <a:t>Project 1 — Demand Forecasting &amp; Inventory Optimization</a:t>
-            </a:r>
-            <a:endParaRPr lang="en-US" sz="1200" dirty="0"/>
           </a:p>
         </p:txBody>
       </p:sp>
@@ -1977,6 +1719,7 @@
         <a:solidFill>
           <a:srgbClr val="FFFFFF"/>
         </a:solidFill>
+        <a:effectLst/>
       </p:bgPr>
     </p:bg>
     <p:spTree>
@@ -2014,11 +1757,11 @@
           <a:bodyPr wrap="square" lIns="0" tIns="0" rIns="0" bIns="0" rtlCol="0" anchor="ctr"/>
           <a:lstStyle/>
           <a:p>
-            <a:pPr indent="0" marL="0">
-              <a:buNone/>
-            </a:pPr>
-            <a:r>
-              <a:rPr lang="en-US" sz="1200" b="1" spc="200" kern="0" dirty="0">
+            <a:pPr marL="0" indent="0">
+              <a:buNone/>
+            </a:pPr>
+            <a:r>
+              <a:rPr lang="en-US" sz="1200" b="1" kern="0" spc="200" dirty="0">
                 <a:solidFill>
                   <a:srgbClr val="A6432B"/>
                 </a:solidFill>
@@ -2053,7 +1796,7 @@
           <a:bodyPr wrap="square" lIns="0" tIns="0" rIns="0" bIns="0" rtlCol="0" anchor="ctr"/>
           <a:lstStyle/>
           <a:p>
-            <a:pPr indent="0" marL="0">
+            <a:pPr marL="0" indent="0">
               <a:buNone/>
             </a:pPr>
             <a:r>
@@ -2092,6 +1835,13 @@
           </a:solidFill>
           <a:ln/>
         </p:spPr>
+        <p:txBody>
+          <a:bodyPr/>
+          <a:lstStyle/>
+          <a:p>
+            <a:endParaRPr lang="en-US"/>
+          </a:p>
+        </p:txBody>
       </p:sp>
       <p:sp>
         <p:nvSpPr>
@@ -2114,7 +1864,7 @@
           <a:bodyPr wrap="square" lIns="0" tIns="0" rIns="0" bIns="0" rtlCol="0" anchor="ctr"/>
           <a:lstStyle/>
           <a:p>
-            <a:pPr indent="0" marL="0">
+            <a:pPr marL="0" indent="0">
               <a:buNone/>
             </a:pPr>
             <a:r>
@@ -2153,7 +1903,7 @@
           <a:bodyPr wrap="square" lIns="0" tIns="0" rIns="0" bIns="0" rtlCol="0" anchor="ctr"/>
           <a:lstStyle/>
           <a:p>
-            <a:pPr indent="0" marL="0">
+            <a:pPr marL="0" indent="0">
               <a:lnSpc>
                 <a:spcPct val="125000"/>
               </a:lnSpc>
@@ -2193,13 +1943,20 @@
           </a:solidFill>
           <a:ln/>
           <a:effectLst>
-            <a:outerShdw sx="100000" sy="100000" kx="0" ky="0" algn="bl" rotWithShape="0" blurRad="76200" dist="25400" dir="5400000">
+            <a:outerShdw blurRad="76200" dist="25400" dir="5400000" algn="bl" rotWithShape="0">
               <a:srgbClr val="000000">
                 <a:alpha val="18000"/>
               </a:srgbClr>
             </a:outerShdw>
           </a:effectLst>
         </p:spPr>
+        <p:txBody>
+          <a:bodyPr/>
+          <a:lstStyle/>
+          <a:p>
+            <a:endParaRPr lang="en-US"/>
+          </a:p>
+        </p:txBody>
       </p:sp>
       <p:sp>
         <p:nvSpPr>
@@ -2222,7 +1979,7 @@
           <a:bodyPr wrap="square" lIns="0" tIns="0" rIns="0" bIns="0" rtlCol="0" anchor="ctr"/>
           <a:lstStyle/>
           <a:p>
-            <a:pPr algn="ctr" indent="0" marL="0">
+            <a:pPr marL="0" indent="0" algn="ctr">
               <a:buNone/>
             </a:pPr>
             <a:r>
@@ -2261,7 +2018,7 @@
           <a:bodyPr wrap="square" lIns="0" tIns="0" rIns="0" bIns="0" rtlCol="0" anchor="ctr"/>
           <a:lstStyle/>
           <a:p>
-            <a:pPr indent="0" marL="0">
+            <a:pPr marL="0" indent="0">
               <a:buNone/>
             </a:pPr>
             <a:r>
@@ -2300,7 +2057,7 @@
           <a:bodyPr wrap="square" lIns="0" tIns="0" rIns="0" bIns="0" rtlCol="0" anchor="ctr"/>
           <a:lstStyle/>
           <a:p>
-            <a:pPr indent="0" marL="0">
+            <a:pPr marL="0" indent="0">
               <a:buNone/>
             </a:pPr>
             <a:r>
@@ -2337,13 +2094,20 @@
           </a:solidFill>
           <a:ln/>
           <a:effectLst>
-            <a:outerShdw sx="100000" sy="100000" kx="0" ky="0" algn="bl" rotWithShape="0" blurRad="76200" dist="25400" dir="5400000">
+            <a:outerShdw blurRad="76200" dist="25400" dir="5400000" algn="bl" rotWithShape="0">
               <a:srgbClr val="000000">
                 <a:alpha val="18000"/>
               </a:srgbClr>
             </a:outerShdw>
           </a:effectLst>
         </p:spPr>
+        <p:txBody>
+          <a:bodyPr/>
+          <a:lstStyle/>
+          <a:p>
+            <a:endParaRPr lang="en-US"/>
+          </a:p>
+        </p:txBody>
       </p:sp>
       <p:sp>
         <p:nvSpPr>
@@ -2366,7 +2130,7 @@
           <a:bodyPr wrap="square" lIns="0" tIns="0" rIns="0" bIns="0" rtlCol="0" anchor="ctr"/>
           <a:lstStyle/>
           <a:p>
-            <a:pPr algn="ctr" indent="0" marL="0">
+            <a:pPr marL="0" indent="0" algn="ctr">
               <a:buNone/>
             </a:pPr>
             <a:r>
@@ -2405,7 +2169,7 @@
           <a:bodyPr wrap="square" lIns="0" tIns="0" rIns="0" bIns="0" rtlCol="0" anchor="ctr"/>
           <a:lstStyle/>
           <a:p>
-            <a:pPr indent="0" marL="0">
+            <a:pPr marL="0" indent="0">
               <a:buNone/>
             </a:pPr>
             <a:r>
@@ -2444,7 +2208,7 @@
           <a:bodyPr wrap="square" lIns="0" tIns="0" rIns="0" bIns="0" rtlCol="0" anchor="ctr"/>
           <a:lstStyle/>
           <a:p>
-            <a:pPr indent="0" marL="0">
+            <a:pPr marL="0" indent="0">
               <a:buNone/>
             </a:pPr>
             <a:r>
@@ -2481,13 +2245,20 @@
           </a:solidFill>
           <a:ln/>
           <a:effectLst>
-            <a:outerShdw sx="100000" sy="100000" kx="0" ky="0" algn="bl" rotWithShape="0" blurRad="76200" dist="25400" dir="5400000">
+            <a:outerShdw blurRad="76200" dist="25400" dir="5400000" algn="bl" rotWithShape="0">
               <a:srgbClr val="000000">
                 <a:alpha val="18000"/>
               </a:srgbClr>
             </a:outerShdw>
           </a:effectLst>
         </p:spPr>
+        <p:txBody>
+          <a:bodyPr/>
+          <a:lstStyle/>
+          <a:p>
+            <a:endParaRPr lang="en-US"/>
+          </a:p>
+        </p:txBody>
       </p:sp>
       <p:sp>
         <p:nvSpPr>
@@ -2510,7 +2281,7 @@
           <a:bodyPr wrap="square" lIns="0" tIns="0" rIns="0" bIns="0" rtlCol="0" anchor="ctr"/>
           <a:lstStyle/>
           <a:p>
-            <a:pPr algn="ctr" indent="0" marL="0">
+            <a:pPr marL="0" indent="0" algn="ctr">
               <a:buNone/>
             </a:pPr>
             <a:r>
@@ -2549,7 +2320,7 @@
           <a:bodyPr wrap="square" lIns="0" tIns="0" rIns="0" bIns="0" rtlCol="0" anchor="ctr"/>
           <a:lstStyle/>
           <a:p>
-            <a:pPr indent="0" marL="0">
+            <a:pPr marL="0" indent="0">
               <a:buNone/>
             </a:pPr>
             <a:r>
@@ -2588,7 +2359,7 @@
           <a:bodyPr wrap="square" lIns="0" tIns="0" rIns="0" bIns="0" rtlCol="0" anchor="ctr"/>
           <a:lstStyle/>
           <a:p>
-            <a:pPr indent="0" marL="0">
+            <a:pPr marL="0" indent="0">
               <a:buNone/>
             </a:pPr>
             <a:r>
@@ -2622,6 +2393,7 @@
         <a:solidFill>
           <a:srgbClr val="FFFFFF"/>
         </a:solidFill>
+        <a:effectLst/>
       </p:bgPr>
     </p:bg>
     <p:spTree>
@@ -2659,11 +2431,11 @@
           <a:bodyPr wrap="square" lIns="0" tIns="0" rIns="0" bIns="0" rtlCol="0" anchor="ctr"/>
           <a:lstStyle/>
           <a:p>
-            <a:pPr indent="0" marL="0">
-              <a:buNone/>
-            </a:pPr>
-            <a:r>
-              <a:rPr lang="en-US" sz="1200" b="1" spc="200" kern="0" dirty="0">
+            <a:pPr marL="0" indent="0">
+              <a:buNone/>
+            </a:pPr>
+            <a:r>
+              <a:rPr lang="en-US" sz="1200" b="1" kern="0" spc="200" dirty="0">
                 <a:solidFill>
                   <a:srgbClr val="A6432B"/>
                 </a:solidFill>
@@ -2698,7 +2470,7 @@
           <a:bodyPr wrap="square" lIns="0" tIns="0" rIns="0" bIns="0" rtlCol="0" anchor="ctr"/>
           <a:lstStyle/>
           <a:p>
-            <a:pPr indent="0" marL="0">
+            <a:pPr marL="0" indent="0">
               <a:buNone/>
             </a:pPr>
             <a:r>
@@ -2742,13 +2514,20 @@
             <a:prstDash val="solid"/>
           </a:ln>
           <a:effectLst>
-            <a:outerShdw sx="100000" sy="100000" kx="0" ky="0" algn="bl" rotWithShape="0" blurRad="101600" dist="38100" dir="5400000">
+            <a:outerShdw blurRad="101600" dist="38100" dir="5400000" algn="bl" rotWithShape="0">
               <a:srgbClr val="000000">
                 <a:alpha val="12000"/>
               </a:srgbClr>
             </a:outerShdw>
           </a:effectLst>
         </p:spPr>
+        <p:txBody>
+          <a:bodyPr/>
+          <a:lstStyle/>
+          <a:p>
+            <a:endParaRPr lang="en-US"/>
+          </a:p>
+        </p:txBody>
       </p:sp>
       <p:sp>
         <p:nvSpPr>
@@ -2769,6 +2548,13 @@
           </a:solidFill>
           <a:ln/>
         </p:spPr>
+        <p:txBody>
+          <a:bodyPr/>
+          <a:lstStyle/>
+          <a:p>
+            <a:endParaRPr lang="en-US"/>
+          </a:p>
+        </p:txBody>
       </p:sp>
       <p:sp>
         <p:nvSpPr>
@@ -2791,11 +2577,11 @@
           <a:bodyPr wrap="square" lIns="0" tIns="0" rIns="0" bIns="0" rtlCol="0" anchor="ctr"/>
           <a:lstStyle/>
           <a:p>
-            <a:pPr algn="ctr" indent="0" marL="0">
-              <a:buNone/>
-            </a:pPr>
-            <a:r>
-              <a:rPr lang="en-US" sz="1300" b="1" spc="200" kern="0" dirty="0">
+            <a:pPr marL="0" indent="0" algn="ctr">
+              <a:buNone/>
+            </a:pPr>
+            <a:r>
+              <a:rPr lang="en-US" sz="1300" b="1" kern="0" spc="200" dirty="0">
                 <a:solidFill>
                   <a:srgbClr val="FFFFFF"/>
                 </a:solidFill>
@@ -2830,7 +2616,7 @@
           <a:bodyPr wrap="square" lIns="0" tIns="0" rIns="0" bIns="0" rtlCol="0" anchor="ctr"/>
           <a:lstStyle/>
           <a:p>
-            <a:pPr indent="0" marL="0">
+            <a:pPr marL="0" indent="0">
               <a:buNone/>
             </a:pPr>
             <a:r>
@@ -2954,7 +2740,7 @@
           <a:bodyPr wrap="square" lIns="0" tIns="0" rIns="0" bIns="0" rtlCol="0" anchor="ctr"/>
           <a:lstStyle/>
           <a:p>
-            <a:pPr algn="ctr" indent="0" marL="0">
+            <a:pPr marL="0" indent="0" algn="ctr">
               <a:buNone/>
             </a:pPr>
             <a:r>
@@ -2998,13 +2784,20 @@
             <a:prstDash val="solid"/>
           </a:ln>
           <a:effectLst>
-            <a:outerShdw sx="100000" sy="100000" kx="0" ky="0" algn="bl" rotWithShape="0" blurRad="101600" dist="38100" dir="5400000">
+            <a:outerShdw blurRad="101600" dist="38100" dir="5400000" algn="bl" rotWithShape="0">
               <a:srgbClr val="000000">
                 <a:alpha val="12000"/>
               </a:srgbClr>
             </a:outerShdw>
           </a:effectLst>
         </p:spPr>
+        <p:txBody>
+          <a:bodyPr/>
+          <a:lstStyle/>
+          <a:p>
+            <a:endParaRPr lang="en-US"/>
+          </a:p>
+        </p:txBody>
       </p:sp>
       <p:sp>
         <p:nvSpPr>
@@ -3025,6 +2818,13 @@
           </a:solidFill>
           <a:ln/>
         </p:spPr>
+        <p:txBody>
+          <a:bodyPr/>
+          <a:lstStyle/>
+          <a:p>
+            <a:endParaRPr lang="en-US"/>
+          </a:p>
+        </p:txBody>
       </p:sp>
       <p:sp>
         <p:nvSpPr>
@@ -3047,11 +2847,11 @@
           <a:bodyPr wrap="square" lIns="0" tIns="0" rIns="0" bIns="0" rtlCol="0" anchor="ctr"/>
           <a:lstStyle/>
           <a:p>
-            <a:pPr algn="ctr" indent="0" marL="0">
-              <a:buNone/>
-            </a:pPr>
-            <a:r>
-              <a:rPr lang="en-US" sz="1300" b="1" spc="200" kern="0" dirty="0">
+            <a:pPr marL="0" indent="0" algn="ctr">
+              <a:buNone/>
+            </a:pPr>
+            <a:r>
+              <a:rPr lang="en-US" sz="1300" b="1" kern="0" spc="200" dirty="0">
                 <a:solidFill>
                   <a:srgbClr val="FFFFFF"/>
                 </a:solidFill>
@@ -3086,7 +2886,7 @@
           <a:bodyPr wrap="square" lIns="0" tIns="0" rIns="0" bIns="0" rtlCol="0" anchor="ctr"/>
           <a:lstStyle/>
           <a:p>
-            <a:pPr indent="0" marL="0">
+            <a:pPr marL="0" indent="0">
               <a:buNone/>
             </a:pPr>
             <a:r>
@@ -3210,7 +3010,7 @@
           <a:bodyPr wrap="square" lIns="0" tIns="0" rIns="0" bIns="0" rtlCol="0" anchor="ctr"/>
           <a:lstStyle/>
           <a:p>
-            <a:pPr algn="ctr" indent="0" marL="0">
+            <a:pPr marL="0" indent="0" algn="ctr">
               <a:buNone/>
             </a:pPr>
             <a:r>
@@ -3254,13 +3054,20 @@
             <a:prstDash val="solid"/>
           </a:ln>
           <a:effectLst>
-            <a:outerShdw sx="100000" sy="100000" kx="0" ky="0" algn="bl" rotWithShape="0" blurRad="101600" dist="38100" dir="5400000">
+            <a:outerShdw blurRad="101600" dist="38100" dir="5400000" algn="bl" rotWithShape="0">
               <a:srgbClr val="000000">
                 <a:alpha val="12000"/>
               </a:srgbClr>
             </a:outerShdw>
           </a:effectLst>
         </p:spPr>
+        <p:txBody>
+          <a:bodyPr/>
+          <a:lstStyle/>
+          <a:p>
+            <a:endParaRPr lang="en-US"/>
+          </a:p>
+        </p:txBody>
       </p:sp>
       <p:sp>
         <p:nvSpPr>
@@ -3281,6 +3088,13 @@
           </a:solidFill>
           <a:ln/>
         </p:spPr>
+        <p:txBody>
+          <a:bodyPr/>
+          <a:lstStyle/>
+          <a:p>
+            <a:endParaRPr lang="en-US"/>
+          </a:p>
+        </p:txBody>
       </p:sp>
       <p:sp>
         <p:nvSpPr>
@@ -3303,11 +3117,11 @@
           <a:bodyPr wrap="square" lIns="0" tIns="0" rIns="0" bIns="0" rtlCol="0" anchor="ctr"/>
           <a:lstStyle/>
           <a:p>
-            <a:pPr algn="ctr" indent="0" marL="0">
-              <a:buNone/>
-            </a:pPr>
-            <a:r>
-              <a:rPr lang="en-US" sz="1300" b="1" spc="200" kern="0" dirty="0">
+            <a:pPr marL="0" indent="0" algn="ctr">
+              <a:buNone/>
+            </a:pPr>
+            <a:r>
+              <a:rPr lang="en-US" sz="1300" b="1" kern="0" spc="200" dirty="0">
                 <a:solidFill>
                   <a:srgbClr val="FFFFFF"/>
                 </a:solidFill>
@@ -3342,7 +3156,7 @@
           <a:bodyPr wrap="square" lIns="0" tIns="0" rIns="0" bIns="0" rtlCol="0" anchor="ctr"/>
           <a:lstStyle/>
           <a:p>
-            <a:pPr indent="0" marL="0">
+            <a:pPr marL="0" indent="0">
               <a:buNone/>
             </a:pPr>
             <a:r>
@@ -3466,6 +3280,13 @@
           </a:solidFill>
           <a:ln/>
         </p:spPr>
+        <p:txBody>
+          <a:bodyPr/>
+          <a:lstStyle/>
+          <a:p>
+            <a:endParaRPr lang="en-US"/>
+          </a:p>
+        </p:txBody>
       </p:sp>
       <p:sp>
         <p:nvSpPr>
@@ -3488,7 +3309,7 @@
           <a:bodyPr wrap="square" lIns="0" tIns="0" rIns="0" bIns="0" rtlCol="0" anchor="ctr"/>
           <a:lstStyle/>
           <a:p>
-            <a:pPr indent="0" marL="0">
+            <a:pPr marL="0" indent="0">
               <a:buNone/>
             </a:pPr>
             <a:r>
@@ -3502,9 +3323,6 @@
               </a:rPr>
               <a:t>Why Tier 2 is a rule, not a model:  </a:t>
             </a:r>
-            <a:pPr indent="0" marL="0">
-              <a:buNone/>
-            </a:pPr>
             <a:r>
               <a:rPr lang="en-US" sz="1300" dirty="0">
                 <a:solidFill>
@@ -3536,6 +3354,7 @@
         <a:solidFill>
           <a:srgbClr val="FFFFFF"/>
         </a:solidFill>
+        <a:effectLst/>
       </p:bgPr>
     </p:bg>
     <p:spTree>
@@ -3573,11 +3392,11 @@
           <a:bodyPr wrap="square" lIns="0" tIns="0" rIns="0" bIns="0" rtlCol="0" anchor="ctr"/>
           <a:lstStyle/>
           <a:p>
-            <a:pPr indent="0" marL="0">
-              <a:buNone/>
-            </a:pPr>
-            <a:r>
-              <a:rPr lang="en-US" sz="1200" b="1" spc="200" kern="0" dirty="0">
+            <a:pPr marL="0" indent="0">
+              <a:buNone/>
+            </a:pPr>
+            <a:r>
+              <a:rPr lang="en-US" sz="1200" b="1" kern="0" spc="200" dirty="0">
                 <a:solidFill>
                   <a:srgbClr val="A6432B"/>
                 </a:solidFill>
@@ -3612,7 +3431,7 @@
           <a:bodyPr wrap="square" lIns="0" tIns="0" rIns="0" bIns="0" rtlCol="0" anchor="ctr"/>
           <a:lstStyle/>
           <a:p>
-            <a:pPr indent="0" marL="0">
+            <a:pPr marL="0" indent="0">
               <a:buNone/>
             </a:pPr>
             <a:r>
@@ -3632,7 +3451,7 @@
       </p:sp>
       <p:graphicFrame>
         <p:nvGraphicFramePr>
-          <p:cNvPr id="4" name="Chart 0" descr=""/>
+          <p:cNvPr id="4" name="Chart 0"/>
           <p:cNvGraphicFramePr/>
           <p:nvPr/>
         </p:nvGraphicFramePr>
@@ -3640,9 +3459,9 @@
           <a:off x="548640" y="1737360"/>
           <a:ext cx="6949440" cy="4206240"/>
         </p:xfrm>
-        <a:graphic xmlns:a="http://schemas.openxmlformats.org/drawingml/2006/main">
+        <a:graphic>
           <a:graphicData uri="http://schemas.openxmlformats.org/drawingml/2006/chart">
-            <c:chart xmlns:c="http://schemas.openxmlformats.org/drawingml/2006/chart" r:id="rId1"/>
+            <c:chart xmlns:c="http://schemas.openxmlformats.org/drawingml/2006/chart" xmlns:r="http://schemas.openxmlformats.org/officeDocument/2006/relationships" r:id="rId3"/>
           </a:graphicData>
         </a:graphic>
       </p:graphicFrame>
@@ -3667,13 +3486,20 @@
           </a:solidFill>
           <a:ln/>
           <a:effectLst>
-            <a:outerShdw sx="100000" sy="100000" kx="0" ky="0" algn="bl" rotWithShape="0" blurRad="101600" dist="38100" dir="5400000">
+            <a:outerShdw blurRad="101600" dist="38100" dir="5400000" algn="bl" rotWithShape="0">
               <a:srgbClr val="000000">
                 <a:alpha val="15000"/>
               </a:srgbClr>
             </a:outerShdw>
           </a:effectLst>
         </p:spPr>
+        <p:txBody>
+          <a:bodyPr/>
+          <a:lstStyle/>
+          <a:p>
+            <a:endParaRPr lang="en-US"/>
+          </a:p>
+        </p:txBody>
       </p:sp>
       <p:sp>
         <p:nvSpPr>
@@ -3696,11 +3522,11 @@
           <a:bodyPr wrap="square" lIns="0" tIns="0" rIns="0" bIns="0" rtlCol="0" anchor="ctr"/>
           <a:lstStyle/>
           <a:p>
-            <a:pPr indent="0" marL="0">
-              <a:buNone/>
-            </a:pPr>
-            <a:r>
-              <a:rPr lang="en-US" sz="1100" b="1" spc="200" kern="0" dirty="0">
+            <a:pPr marL="0" indent="0">
+              <a:buNone/>
+            </a:pPr>
+            <a:r>
+              <a:rPr lang="en-US" sz="1100" b="1" kern="0" spc="200" dirty="0">
                 <a:solidFill>
                   <a:srgbClr val="C89B3C"/>
                 </a:solidFill>
@@ -3735,7 +3561,7 @@
           <a:bodyPr wrap="square" lIns="0" tIns="0" rIns="0" bIns="0" rtlCol="0" anchor="ctr"/>
           <a:lstStyle/>
           <a:p>
-            <a:pPr indent="0" marL="0">
+            <a:pPr marL="0" indent="0">
               <a:buNone/>
             </a:pPr>
             <a:r>
@@ -3774,7 +3600,7 @@
           <a:bodyPr wrap="square" lIns="0" tIns="0" rIns="0" bIns="0" rtlCol="0" anchor="ctr"/>
           <a:lstStyle/>
           <a:p>
-            <a:pPr indent="0" marL="0">
+            <a:pPr marL="0" indent="0">
               <a:lnSpc>
                 <a:spcPct val="125000"/>
               </a:lnSpc>
@@ -3816,7 +3642,7 @@
           <a:bodyPr wrap="square" lIns="0" tIns="0" rIns="0" bIns="0" rtlCol="0" anchor="ctr"/>
           <a:lstStyle/>
           <a:p>
-            <a:pPr indent="0" marL="0">
+            <a:pPr marL="0" indent="0">
               <a:buNone/>
             </a:pPr>
             <a:r>
@@ -3855,7 +3681,7 @@
           <a:bodyPr wrap="square" lIns="0" tIns="0" rIns="0" bIns="0" rtlCol="0" anchor="ctr"/>
           <a:lstStyle/>
           <a:p>
-            <a:pPr indent="0" marL="0">
+            <a:pPr marL="0" indent="0">
               <a:buNone/>
             </a:pPr>
             <a:r>
@@ -3889,6 +3715,7 @@
         <a:solidFill>
           <a:srgbClr val="FFFFFF"/>
         </a:solidFill>
+        <a:effectLst/>
       </p:bgPr>
     </p:bg>
     <p:spTree>
@@ -3926,11 +3753,11 @@
           <a:bodyPr wrap="square" lIns="0" tIns="0" rIns="0" bIns="0" rtlCol="0" anchor="ctr"/>
           <a:lstStyle/>
           <a:p>
-            <a:pPr indent="0" marL="0">
-              <a:buNone/>
-            </a:pPr>
-            <a:r>
-              <a:rPr lang="en-US" sz="1200" b="1" spc="200" kern="0" dirty="0">
+            <a:pPr marL="0" indent="0">
+              <a:buNone/>
+            </a:pPr>
+            <a:r>
+              <a:rPr lang="en-US" sz="1200" b="1" kern="0" spc="200" dirty="0">
                 <a:solidFill>
                   <a:srgbClr val="A6432B"/>
                 </a:solidFill>
@@ -3965,7 +3792,7 @@
           <a:bodyPr wrap="square" lIns="0" tIns="0" rIns="0" bIns="0" rtlCol="0" anchor="ctr"/>
           <a:lstStyle/>
           <a:p>
-            <a:pPr indent="0" marL="0">
+            <a:pPr marL="0" indent="0">
               <a:buNone/>
             </a:pPr>
             <a:r>
@@ -4009,25 +3836,32 @@
             <a:prstDash val="solid"/>
           </a:ln>
           <a:effectLst>
-            <a:outerShdw sx="100000" sy="100000" kx="0" ky="0" algn="bl" rotWithShape="0" blurRad="127000" dist="38100" dir="5400000">
+            <a:outerShdw blurRad="127000" dist="38100" dir="5400000" algn="bl" rotWithShape="0">
               <a:srgbClr val="000000">
                 <a:alpha val="15000"/>
               </a:srgbClr>
             </a:outerShdw>
           </a:effectLst>
         </p:spPr>
+        <p:txBody>
+          <a:bodyPr/>
+          <a:lstStyle/>
+          <a:p>
+            <a:endParaRPr lang="en-US"/>
+          </a:p>
+        </p:txBody>
       </p:sp>
       <p:pic>
         <p:nvPicPr>
-          <p:cNvPr id="5" name="Image 0" descr="screenshot_overview.png">    </p:cNvPr>
+          <p:cNvPr id="5" name="Image 0" descr="screenshot_overview.png"/>
           <p:cNvPicPr>
             <a:picLocks noChangeAspect="1"/>
           </p:cNvPicPr>
           <p:nvPr/>
         </p:nvPicPr>
         <p:blipFill>
-          <a:blip r:embed="rId1"/>
-          <a:srcRect l="0" r="0" t="0" b="0"/>
+          <a:blip r:embed="rId3"/>
+          <a:srcRect/>
           <a:stretch/>
         </p:blipFill>
         <p:spPr>
@@ -4048,7 +3882,7 @@
         </p:nvSpPr>
         <p:spPr>
           <a:xfrm>
-            <a:off x="548640" y="6812378"/>
+            <a:off x="685800" y="6355178"/>
             <a:ext cx="10698480" cy="365760"/>
           </a:xfrm>
           <a:prstGeom prst="rect">
@@ -4061,7 +3895,7 @@
           <a:bodyPr wrap="square" lIns="0" tIns="0" rIns="0" bIns="0" rtlCol="0" anchor="ctr"/>
           <a:lstStyle/>
           <a:p>
-            <a:pPr indent="0" marL="0">
+            <a:pPr marL="0" indent="0">
               <a:buNone/>
             </a:pPr>
             <a:r>
@@ -4095,6 +3929,7 @@
         <a:solidFill>
           <a:srgbClr val="FFFFFF"/>
         </a:solidFill>
+        <a:effectLst/>
       </p:bgPr>
     </p:bg>
     <p:spTree>
@@ -4132,11 +3967,11 @@
           <a:bodyPr wrap="square" lIns="0" tIns="0" rIns="0" bIns="0" rtlCol="0" anchor="ctr"/>
           <a:lstStyle/>
           <a:p>
-            <a:pPr indent="0" marL="0">
-              <a:buNone/>
-            </a:pPr>
-            <a:r>
-              <a:rPr lang="en-US" sz="1200" b="1" spc="200" kern="0" dirty="0">
+            <a:pPr marL="0" indent="0">
+              <a:buNone/>
+            </a:pPr>
+            <a:r>
+              <a:rPr lang="en-US" sz="1200" b="1" kern="0" spc="200" dirty="0">
                 <a:solidFill>
                   <a:srgbClr val="A6432B"/>
                 </a:solidFill>
@@ -4171,7 +4006,7 @@
           <a:bodyPr wrap="square" lIns="0" tIns="0" rIns="0" bIns="0" rtlCol="0" anchor="ctr"/>
           <a:lstStyle/>
           <a:p>
-            <a:pPr indent="0" marL="0">
+            <a:pPr marL="0" indent="0">
               <a:buNone/>
             </a:pPr>
             <a:r>
@@ -4210,6 +4045,13 @@
           </a:solidFill>
           <a:ln/>
         </p:spPr>
+        <p:txBody>
+          <a:bodyPr/>
+          <a:lstStyle/>
+          <a:p>
+            <a:endParaRPr lang="en-US"/>
+          </a:p>
+        </p:txBody>
       </p:sp>
       <p:sp>
         <p:nvSpPr>
@@ -4232,7 +4074,7 @@
           <a:bodyPr wrap="square" lIns="0" tIns="0" rIns="0" bIns="0" rtlCol="0" anchor="ctr"/>
           <a:lstStyle/>
           <a:p>
-            <a:pPr indent="0" marL="0">
+            <a:pPr marL="0" indent="0">
               <a:buNone/>
             </a:pPr>
             <a:r>
@@ -4271,7 +4113,7 @@
           <a:bodyPr wrap="square" lIns="0" tIns="0" rIns="0" bIns="0" rtlCol="0" anchor="ctr"/>
           <a:lstStyle/>
           <a:p>
-            <a:pPr indent="0" marL="0">
+            <a:pPr marL="0" indent="0">
               <a:buNone/>
             </a:pPr>
             <a:r>
@@ -4310,7 +4152,7 @@
           <a:bodyPr wrap="square" lIns="0" tIns="0" rIns="0" bIns="0" rtlCol="0" anchor="ctr"/>
           <a:lstStyle/>
           <a:p>
-            <a:pPr indent="0" marL="0">
+            <a:pPr marL="0" indent="0">
               <a:buNone/>
             </a:pPr>
             <a:r>
@@ -4322,7 +4164,7 @@
                 <a:ea typeface="Calibri" pitchFamily="34" charset="-122"/>
                 <a:cs typeface="Calibri" pitchFamily="34" charset="-120"/>
               </a:rPr>
-              <a:t>Beats naive baseline by ~12% relative</a:t>
+              <a:t>Beats baseline by ~12% relative</a:t>
             </a:r>
             <a:endParaRPr lang="en-US" sz="1200" dirty="0"/>
           </a:p>
@@ -4349,6 +4191,13 @@
           </a:solidFill>
           <a:ln/>
         </p:spPr>
+        <p:txBody>
+          <a:bodyPr/>
+          <a:lstStyle/>
+          <a:p>
+            <a:endParaRPr lang="en-US"/>
+          </a:p>
+        </p:txBody>
       </p:sp>
       <p:sp>
         <p:nvSpPr>
@@ -4371,7 +4220,7 @@
           <a:bodyPr wrap="square" lIns="0" tIns="0" rIns="0" bIns="0" rtlCol="0" anchor="ctr"/>
           <a:lstStyle/>
           <a:p>
-            <a:pPr indent="0" marL="0">
+            <a:pPr marL="0" indent="0">
               <a:buNone/>
             </a:pPr>
             <a:r>
@@ -4410,7 +4259,7 @@
           <a:bodyPr wrap="square" lIns="0" tIns="0" rIns="0" bIns="0" rtlCol="0" anchor="ctr"/>
           <a:lstStyle/>
           <a:p>
-            <a:pPr indent="0" marL="0">
+            <a:pPr marL="0" indent="0">
               <a:buNone/>
             </a:pPr>
             <a:r>
@@ -4449,7 +4298,7 @@
           <a:bodyPr wrap="square" lIns="0" tIns="0" rIns="0" bIns="0" rtlCol="0" anchor="ctr"/>
           <a:lstStyle/>
           <a:p>
-            <a:pPr indent="0" marL="0">
+            <a:pPr marL="0" indent="0">
               <a:buNone/>
             </a:pPr>
             <a:r>
@@ -4486,13 +4335,20 @@
           </a:solidFill>
           <a:ln/>
           <a:effectLst>
-            <a:outerShdw sx="100000" sy="100000" kx="0" ky="0" algn="bl" rotWithShape="0" blurRad="76200" dist="25400" dir="5400000">
+            <a:outerShdw blurRad="76200" dist="25400" dir="5400000" algn="bl" rotWithShape="0">
               <a:srgbClr val="000000">
                 <a:alpha val="18000"/>
               </a:srgbClr>
             </a:outerShdw>
           </a:effectLst>
         </p:spPr>
+        <p:txBody>
+          <a:bodyPr/>
+          <a:lstStyle/>
+          <a:p>
+            <a:endParaRPr lang="en-US"/>
+          </a:p>
+        </p:txBody>
       </p:sp>
       <p:sp>
         <p:nvSpPr>
@@ -4515,7 +4371,7 @@
           <a:bodyPr wrap="square" lIns="0" tIns="0" rIns="0" bIns="0" rtlCol="0" anchor="ctr"/>
           <a:lstStyle/>
           <a:p>
-            <a:pPr algn="ctr" indent="0" marL="0">
+            <a:pPr marL="0" indent="0" algn="ctr">
               <a:buNone/>
             </a:pPr>
             <a:r>
@@ -4554,7 +4410,7 @@
           <a:bodyPr wrap="square" lIns="0" tIns="0" rIns="0" bIns="0" rtlCol="0" anchor="ctr"/>
           <a:lstStyle/>
           <a:p>
-            <a:pPr indent="0" marL="0">
+            <a:pPr marL="0" indent="0">
               <a:lnSpc>
                 <a:spcPct val="120000"/>
               </a:lnSpc>
@@ -4594,13 +4450,20 @@
           </a:solidFill>
           <a:ln/>
           <a:effectLst>
-            <a:outerShdw sx="100000" sy="100000" kx="0" ky="0" algn="bl" rotWithShape="0" blurRad="76200" dist="25400" dir="5400000">
+            <a:outerShdw blurRad="76200" dist="25400" dir="5400000" algn="bl" rotWithShape="0">
               <a:srgbClr val="000000">
                 <a:alpha val="18000"/>
               </a:srgbClr>
             </a:outerShdw>
           </a:effectLst>
         </p:spPr>
+        <p:txBody>
+          <a:bodyPr/>
+          <a:lstStyle/>
+          <a:p>
+            <a:endParaRPr lang="en-US"/>
+          </a:p>
+        </p:txBody>
       </p:sp>
       <p:sp>
         <p:nvSpPr>
@@ -4623,7 +4486,7 @@
           <a:bodyPr wrap="square" lIns="0" tIns="0" rIns="0" bIns="0" rtlCol="0" anchor="ctr"/>
           <a:lstStyle/>
           <a:p>
-            <a:pPr algn="ctr" indent="0" marL="0">
+            <a:pPr marL="0" indent="0" algn="ctr">
               <a:buNone/>
             </a:pPr>
             <a:r>
@@ -4643,13 +4506,13 @@
       </p:sp>
       <p:sp>
         <p:nvSpPr>
-          <p:cNvPr id="17" name="Text 15"/>
-          <p:cNvSpPr txBox="1"/>
-          <p:nvPr/>
-        </p:nvSpPr>
-        <p:spPr>
-          <a:xfrm>
-            <a:off x="1143000" y="4498848"/>
+          <p:cNvPr id="20" name="Text 18"/>
+          <p:cNvSpPr txBox="1"/>
+          <p:nvPr/>
+        </p:nvSpPr>
+        <p:spPr>
+          <a:xfrm>
+            <a:off x="1143000" y="4411980"/>
             <a:ext cx="10332720" cy="685800"/>
           </a:xfrm>
           <a:prstGeom prst="rect">
@@ -4662,115 +4525,7 @@
           <a:bodyPr wrap="square" lIns="0" tIns="0" rIns="0" bIns="0" rtlCol="0" anchor="ctr"/>
           <a:lstStyle/>
           <a:p>
-            <a:pPr indent="0" marL="0">
-              <a:lnSpc>
-                <a:spcPct val="120000"/>
-              </a:lnSpc>
-              <a:buNone/>
-            </a:pPr>
-            <a:r>
-              <a:rPr lang="en-US" sz="1300" dirty="0">
-                <a:solidFill>
-                  <a:srgbClr val="2B2118"/>
-                </a:solidFill>
-                <a:latin typeface="Calibri" pitchFamily="34" charset="0"/>
-                <a:ea typeface="Calibri" pitchFamily="34" charset="-122"/>
-                <a:cs typeface="Calibri" pitchFamily="34" charset="-120"/>
-              </a:rPr>
-              <a:t>Today's status is computed from real stock, not the forecast trajectory — avoids the trap of a depleting-to-zero simulation misreporting a healthy SKU as understock.</a:t>
-            </a:r>
-            <a:endParaRPr lang="en-US" sz="1300" dirty="0"/>
-          </a:p>
-        </p:txBody>
-      </p:sp>
-      <p:sp>
-        <p:nvSpPr>
-          <p:cNvPr id="18" name="Shape 16"/>
-          <p:cNvSpPr/>
-          <p:nvPr/>
-        </p:nvSpPr>
-        <p:spPr>
-          <a:xfrm>
-            <a:off x="548640" y="5349240"/>
-            <a:ext cx="365760" cy="365760"/>
-          </a:xfrm>
-          <a:prstGeom prst="ellipse">
-            <a:avLst/>
-          </a:prstGeom>
-          <a:solidFill>
-            <a:srgbClr val="C89B3C"/>
-          </a:solidFill>
-          <a:ln/>
-          <a:effectLst>
-            <a:outerShdw sx="100000" sy="100000" kx="0" ky="0" algn="bl" rotWithShape="0" blurRad="76200" dist="25400" dir="5400000">
-              <a:srgbClr val="000000">
-                <a:alpha val="18000"/>
-              </a:srgbClr>
-            </a:outerShdw>
-          </a:effectLst>
-        </p:spPr>
-      </p:sp>
-      <p:sp>
-        <p:nvSpPr>
-          <p:cNvPr id="19" name="Text 17"/>
-          <p:cNvSpPr txBox="1"/>
-          <p:nvPr/>
-        </p:nvSpPr>
-        <p:spPr>
-          <a:xfrm>
-            <a:off x="548640" y="5349240"/>
-            <a:ext cx="365760" cy="365760"/>
-          </a:xfrm>
-          <a:prstGeom prst="rect">
-            <a:avLst/>
-          </a:prstGeom>
-          <a:noFill/>
-          <a:ln/>
-        </p:spPr>
-        <p:txBody>
-          <a:bodyPr wrap="square" lIns="0" tIns="0" rIns="0" bIns="0" rtlCol="0" anchor="ctr"/>
-          <a:lstStyle/>
-          <a:p>
-            <a:pPr algn="ctr" indent="0" marL="0">
-              <a:buNone/>
-            </a:pPr>
-            <a:r>
-              <a:rPr lang="en-US" sz="1500" b="1" dirty="0">
-                <a:solidFill>
-                  <a:srgbClr val="2B2118"/>
-                </a:solidFill>
-                <a:latin typeface="Calibri" pitchFamily="34" charset="0"/>
-                <a:ea typeface="Calibri" pitchFamily="34" charset="-122"/>
-                <a:cs typeface="Calibri" pitchFamily="34" charset="-120"/>
-              </a:rPr>
-              <a:t>3</a:t>
-            </a:r>
-            <a:endParaRPr lang="en-US" sz="1500" dirty="0"/>
-          </a:p>
-        </p:txBody>
-      </p:sp>
-      <p:sp>
-        <p:nvSpPr>
-          <p:cNvPr id="20" name="Text 18"/>
-          <p:cNvSpPr txBox="1"/>
-          <p:nvPr/>
-        </p:nvSpPr>
-        <p:spPr>
-          <a:xfrm>
-            <a:off x="1143000" y="5276088"/>
-            <a:ext cx="10332720" cy="685800"/>
-          </a:xfrm>
-          <a:prstGeom prst="rect">
-            <a:avLst/>
-          </a:prstGeom>
-          <a:noFill/>
-          <a:ln/>
-        </p:spPr>
-        <p:txBody>
-          <a:bodyPr wrap="square" lIns="0" tIns="0" rIns="0" bIns="0" rtlCol="0" anchor="ctr"/>
-          <a:lstStyle/>
-          <a:p>
-            <a:pPr indent="0" marL="0">
+            <a:pPr marL="0" indent="0">
               <a:lnSpc>
                 <a:spcPct val="120000"/>
               </a:lnSpc>
@@ -4807,6 +4562,7 @@
         <a:solidFill>
           <a:srgbClr val="2B2118"/>
         </a:solidFill>
+        <a:effectLst/>
       </p:bgPr>
     </p:bg>
     <p:spTree>
@@ -4842,6 +4598,13 @@
           </a:solidFill>
           <a:ln/>
         </p:spPr>
+        <p:txBody>
+          <a:bodyPr/>
+          <a:lstStyle/>
+          <a:p>
+            <a:endParaRPr lang="en-US"/>
+          </a:p>
+        </p:txBody>
       </p:sp>
       <p:sp>
         <p:nvSpPr>
@@ -4864,11 +4627,11 @@
           <a:bodyPr wrap="square" lIns="0" tIns="0" rIns="0" bIns="0" rtlCol="0" anchor="ctr"/>
           <a:lstStyle/>
           <a:p>
-            <a:pPr indent="0" marL="0">
-              <a:buNone/>
-            </a:pPr>
-            <a:r>
-              <a:rPr lang="en-US" sz="1300" b="1" spc="200" kern="0" dirty="0">
+            <a:pPr marL="0" indent="0">
+              <a:buNone/>
+            </a:pPr>
+            <a:r>
+              <a:rPr lang="en-US" sz="1300" b="1" kern="0" spc="200" dirty="0">
                 <a:solidFill>
                   <a:srgbClr val="C89B3C"/>
                 </a:solidFill>
@@ -4903,7 +4666,7 @@
           <a:bodyPr wrap="square" lIns="0" tIns="0" rIns="0" bIns="0" rtlCol="0" anchor="ctr"/>
           <a:lstStyle/>
           <a:p>
-            <a:pPr indent="0" marL="0">
+            <a:pPr marL="0" indent="0">
               <a:buNone/>
             </a:pPr>
             <a:r>
@@ -4940,13 +4703,20 @@
           </a:solidFill>
           <a:ln/>
           <a:effectLst>
-            <a:outerShdw sx="100000" sy="100000" kx="0" ky="0" algn="bl" rotWithShape="0" blurRad="76200" dist="25400" dir="5400000">
+            <a:outerShdw blurRad="76200" dist="25400" dir="5400000" algn="bl" rotWithShape="0">
               <a:srgbClr val="000000">
                 <a:alpha val="18000"/>
               </a:srgbClr>
             </a:outerShdw>
           </a:effectLst>
         </p:spPr>
+        <p:txBody>
+          <a:bodyPr/>
+          <a:lstStyle/>
+          <a:p>
+            <a:endParaRPr lang="en-US"/>
+          </a:p>
+        </p:txBody>
       </p:sp>
       <p:sp>
         <p:nvSpPr>
@@ -4969,7 +4739,7 @@
           <a:bodyPr wrap="square" lIns="0" tIns="0" rIns="0" bIns="0" rtlCol="0" anchor="ctr"/>
           <a:lstStyle/>
           <a:p>
-            <a:pPr algn="ctr" indent="0" marL="0">
+            <a:pPr marL="0" indent="0" algn="ctr">
               <a:buNone/>
             </a:pPr>
             <a:r>
@@ -5008,7 +4778,7 @@
           <a:bodyPr wrap="square" lIns="0" tIns="0" rIns="0" bIns="0" rtlCol="0" anchor="ctr"/>
           <a:lstStyle/>
           <a:p>
-            <a:pPr indent="0" marL="0">
+            <a:pPr marL="0" indent="0">
               <a:buNone/>
             </a:pPr>
             <a:r>
@@ -5047,7 +4817,7 @@
           <a:bodyPr wrap="square" lIns="0" tIns="0" rIns="0" bIns="0" rtlCol="0" anchor="ctr"/>
           <a:lstStyle/>
           <a:p>
-            <a:pPr indent="0" marL="0">
+            <a:pPr marL="0" indent="0">
               <a:lnSpc>
                 <a:spcPct val="120000"/>
               </a:lnSpc>
@@ -5087,13 +4857,20 @@
           </a:solidFill>
           <a:ln/>
           <a:effectLst>
-            <a:outerShdw sx="100000" sy="100000" kx="0" ky="0" algn="bl" rotWithShape="0" blurRad="76200" dist="25400" dir="5400000">
+            <a:outerShdw blurRad="76200" dist="25400" dir="5400000" algn="bl" rotWithShape="0">
               <a:srgbClr val="000000">
                 <a:alpha val="18000"/>
               </a:srgbClr>
             </a:outerShdw>
           </a:effectLst>
         </p:spPr>
+        <p:txBody>
+          <a:bodyPr/>
+          <a:lstStyle/>
+          <a:p>
+            <a:endParaRPr lang="en-US"/>
+          </a:p>
+        </p:txBody>
       </p:sp>
       <p:sp>
         <p:nvSpPr>
@@ -5116,7 +4893,7 @@
           <a:bodyPr wrap="square" lIns="0" tIns="0" rIns="0" bIns="0" rtlCol="0" anchor="ctr"/>
           <a:lstStyle/>
           <a:p>
-            <a:pPr algn="ctr" indent="0" marL="0">
+            <a:pPr marL="0" indent="0" algn="ctr">
               <a:buNone/>
             </a:pPr>
             <a:r>
@@ -5155,7 +4932,7 @@
           <a:bodyPr wrap="square" lIns="0" tIns="0" rIns="0" bIns="0" rtlCol="0" anchor="ctr"/>
           <a:lstStyle/>
           <a:p>
-            <a:pPr indent="0" marL="0">
+            <a:pPr marL="0" indent="0">
               <a:buNone/>
             </a:pPr>
             <a:r>
@@ -5194,7 +4971,7 @@
           <a:bodyPr wrap="square" lIns="0" tIns="0" rIns="0" bIns="0" rtlCol="0" anchor="ctr"/>
           <a:lstStyle/>
           <a:p>
-            <a:pPr indent="0" marL="0">
+            <a:pPr marL="0" indent="0">
               <a:lnSpc>
                 <a:spcPct val="120000"/>
               </a:lnSpc>
@@ -5234,13 +5011,20 @@
           </a:solidFill>
           <a:ln/>
           <a:effectLst>
-            <a:outerShdw sx="100000" sy="100000" kx="0" ky="0" algn="bl" rotWithShape="0" blurRad="76200" dist="25400" dir="5400000">
+            <a:outerShdw blurRad="76200" dist="25400" dir="5400000" algn="bl" rotWithShape="0">
               <a:srgbClr val="000000">
                 <a:alpha val="18000"/>
               </a:srgbClr>
             </a:outerShdw>
           </a:effectLst>
         </p:spPr>
+        <p:txBody>
+          <a:bodyPr/>
+          <a:lstStyle/>
+          <a:p>
+            <a:endParaRPr lang="en-US"/>
+          </a:p>
+        </p:txBody>
       </p:sp>
       <p:sp>
         <p:nvSpPr>
@@ -5263,7 +5047,7 @@
           <a:bodyPr wrap="square" lIns="0" tIns="0" rIns="0" bIns="0" rtlCol="0" anchor="ctr"/>
           <a:lstStyle/>
           <a:p>
-            <a:pPr algn="ctr" indent="0" marL="0">
+            <a:pPr marL="0" indent="0" algn="ctr">
               <a:buNone/>
             </a:pPr>
             <a:r>
@@ -5302,7 +5086,7 @@
           <a:bodyPr wrap="square" lIns="0" tIns="0" rIns="0" bIns="0" rtlCol="0" anchor="ctr"/>
           <a:lstStyle/>
           <a:p>
-            <a:pPr indent="0" marL="0">
+            <a:pPr marL="0" indent="0">
               <a:buNone/>
             </a:pPr>
             <a:r>
@@ -5341,7 +5125,7 @@
           <a:bodyPr wrap="square" lIns="0" tIns="0" rIns="0" bIns="0" rtlCol="0" anchor="ctr"/>
           <a:lstStyle/>
           <a:p>
-            <a:pPr indent="0" marL="0">
+            <a:pPr marL="0" indent="0">
               <a:lnSpc>
                 <a:spcPct val="120000"/>
               </a:lnSpc>
@@ -5381,13 +5165,20 @@
           </a:solidFill>
           <a:ln/>
           <a:effectLst>
-            <a:outerShdw sx="100000" sy="100000" kx="0" ky="0" algn="bl" rotWithShape="0" blurRad="76200" dist="25400" dir="5400000">
+            <a:outerShdw blurRad="76200" dist="25400" dir="5400000" algn="bl" rotWithShape="0">
               <a:srgbClr val="000000">
                 <a:alpha val="18000"/>
               </a:srgbClr>
             </a:outerShdw>
           </a:effectLst>
         </p:spPr>
+        <p:txBody>
+          <a:bodyPr/>
+          <a:lstStyle/>
+          <a:p>
+            <a:endParaRPr lang="en-US"/>
+          </a:p>
+        </p:txBody>
       </p:sp>
       <p:sp>
         <p:nvSpPr>
@@ -5410,7 +5201,7 @@
           <a:bodyPr wrap="square" lIns="0" tIns="0" rIns="0" bIns="0" rtlCol="0" anchor="ctr"/>
           <a:lstStyle/>
           <a:p>
-            <a:pPr algn="ctr" indent="0" marL="0">
+            <a:pPr marL="0" indent="0" algn="ctr">
               <a:buNone/>
             </a:pPr>
             <a:r>
@@ -5449,7 +5240,7 @@
           <a:bodyPr wrap="square" lIns="0" tIns="0" rIns="0" bIns="0" rtlCol="0" anchor="ctr"/>
           <a:lstStyle/>
           <a:p>
-            <a:pPr indent="0" marL="0">
+            <a:pPr marL="0" indent="0">
               <a:buNone/>
             </a:pPr>
             <a:r>
@@ -5488,7 +5279,7 @@
           <a:bodyPr wrap="square" lIns="0" tIns="0" rIns="0" bIns="0" rtlCol="0" anchor="ctr"/>
           <a:lstStyle/>
           <a:p>
-            <a:pPr indent="0" marL="0">
+            <a:pPr marL="0" indent="0">
               <a:lnSpc>
                 <a:spcPct val="120000"/>
               </a:lnSpc>
@@ -5528,13 +5319,20 @@
           </a:solidFill>
           <a:ln/>
           <a:effectLst>
-            <a:outerShdw sx="100000" sy="100000" kx="0" ky="0" algn="bl" rotWithShape="0" blurRad="76200" dist="25400" dir="5400000">
+            <a:outerShdw blurRad="76200" dist="25400" dir="5400000" algn="bl" rotWithShape="0">
               <a:srgbClr val="000000">
                 <a:alpha val="18000"/>
               </a:srgbClr>
             </a:outerShdw>
           </a:effectLst>
         </p:spPr>
+        <p:txBody>
+          <a:bodyPr/>
+          <a:lstStyle/>
+          <a:p>
+            <a:endParaRPr lang="en-US"/>
+          </a:p>
+        </p:txBody>
       </p:sp>
       <p:sp>
         <p:nvSpPr>
@@ -5557,7 +5355,7 @@
           <a:bodyPr wrap="square" lIns="0" tIns="0" rIns="0" bIns="0" rtlCol="0" anchor="ctr"/>
           <a:lstStyle/>
           <a:p>
-            <a:pPr algn="ctr" indent="0" marL="0">
+            <a:pPr marL="0" indent="0" algn="ctr">
               <a:buNone/>
             </a:pPr>
             <a:r>
@@ -5596,7 +5394,7 @@
           <a:bodyPr wrap="square" lIns="0" tIns="0" rIns="0" bIns="0" rtlCol="0" anchor="ctr"/>
           <a:lstStyle/>
           <a:p>
-            <a:pPr indent="0" marL="0">
+            <a:pPr marL="0" indent="0">
               <a:buNone/>
             </a:pPr>
             <a:r>
@@ -5635,7 +5433,7 @@
           <a:bodyPr wrap="square" lIns="0" tIns="0" rIns="0" bIns="0" rtlCol="0" anchor="ctr"/>
           <a:lstStyle/>
           <a:p>
-            <a:pPr indent="0" marL="0">
+            <a:pPr marL="0" indent="0">
               <a:lnSpc>
                 <a:spcPct val="120000"/>
               </a:lnSpc>
@@ -5678,6 +5476,13 @@
             <a:prstDash val="solid"/>
           </a:ln>
         </p:spPr>
+        <p:txBody>
+          <a:bodyPr/>
+          <a:lstStyle/>
+          <a:p>
+            <a:endParaRPr lang="en-US"/>
+          </a:p>
+        </p:txBody>
       </p:sp>
       <p:sp>
         <p:nvSpPr>
@@ -5700,7 +5505,7 @@
           <a:bodyPr wrap="square" lIns="0" tIns="0" rIns="0" bIns="0" rtlCol="0" anchor="ctr"/>
           <a:lstStyle/>
           <a:p>
-            <a:pPr indent="0" marL="0">
+            <a:pPr marL="0" indent="0">
               <a:buNone/>
             </a:pPr>
             <a:r>
@@ -6019,4 +5824,319 @@
     </a:ext>
   </a:extLst>
 </a:theme>
+</file>
+
+<file path=ppt/theme/theme2.xml><?xml version="1.0" encoding="utf-8"?>
+<a:theme xmlns:a="http://schemas.openxmlformats.org/drawingml/2006/main" name="Office Theme">
+  <a:themeElements>
+    <a:clrScheme name="Office">
+      <a:dk1>
+        <a:sysClr val="windowText" lastClr="000000"/>
+      </a:dk1>
+      <a:lt1>
+        <a:sysClr val="window" lastClr="FFFFFF"/>
+      </a:lt1>
+      <a:dk2>
+        <a:srgbClr val="0E2841"/>
+      </a:dk2>
+      <a:lt2>
+        <a:srgbClr val="E8E8E8"/>
+      </a:lt2>
+      <a:accent1>
+        <a:srgbClr val="156082"/>
+      </a:accent1>
+      <a:accent2>
+        <a:srgbClr val="E97132"/>
+      </a:accent2>
+      <a:accent3>
+        <a:srgbClr val="196B24"/>
+      </a:accent3>
+      <a:accent4>
+        <a:srgbClr val="0F9ED5"/>
+      </a:accent4>
+      <a:accent5>
+        <a:srgbClr val="A02B93"/>
+      </a:accent5>
+      <a:accent6>
+        <a:srgbClr val="4EA72E"/>
+      </a:accent6>
+      <a:hlink>
+        <a:srgbClr val="467886"/>
+      </a:hlink>
+      <a:folHlink>
+        <a:srgbClr val="96607D"/>
+      </a:folHlink>
+    </a:clrScheme>
+    <a:fontScheme name="Office">
+      <a:majorFont>
+        <a:latin typeface="Aptos Display" panose="02110004020202020204"/>
+        <a:ea typeface=""/>
+        <a:cs typeface=""/>
+        <a:font script="Jpan" typeface="游ゴシック Light"/>
+        <a:font script="Hang" typeface="맑은 고딕"/>
+        <a:font script="Hans" typeface="等线 Light"/>
+        <a:font script="Hant" typeface="新細明體"/>
+        <a:font script="Arab" typeface="Times New Roman"/>
+        <a:font script="Hebr" typeface="Times New Roman"/>
+        <a:font script="Thai" typeface="Angsana New"/>
+        <a:font script="Ethi" typeface="Nyala"/>
+        <a:font script="Beng" typeface="Vrinda"/>
+        <a:font script="Gujr" typeface="Shruti"/>
+        <a:font script="Khmr" typeface="MoolBoran"/>
+        <a:font script="Knda" typeface="Tunga"/>
+        <a:font script="Guru" typeface="Raavi"/>
+        <a:font script="Cans" typeface="Euphemia"/>
+        <a:font script="Cher" typeface="Plantagenet Cherokee"/>
+        <a:font script="Yiii" typeface="Microsoft Yi Baiti"/>
+        <a:font script="Tibt" typeface="Microsoft Himalaya"/>
+        <a:font script="Thaa" typeface="MV Boli"/>
+        <a:font script="Deva" typeface="Mangal"/>
+        <a:font script="Telu" typeface="Gautami"/>
+        <a:font script="Taml" typeface="Latha"/>
+        <a:font script="Syrc" typeface="Estrangelo Edessa"/>
+        <a:font script="Orya" typeface="Kalinga"/>
+        <a:font script="Mlym" typeface="Kartika"/>
+        <a:font script="Laoo" typeface="DokChampa"/>
+        <a:font script="Sinh" typeface="Iskoola Pota"/>
+        <a:font script="Mong" typeface="Mongolian Baiti"/>
+        <a:font script="Viet" typeface="Times New Roman"/>
+        <a:font script="Uigh" typeface="Microsoft Uighur"/>
+        <a:font script="Geor" typeface="Sylfaen"/>
+        <a:font script="Armn" typeface="Arial"/>
+        <a:font script="Bugi" typeface="Leelawadee UI"/>
+        <a:font script="Bopo" typeface="Microsoft JhengHei"/>
+        <a:font script="Java" typeface="Javanese Text"/>
+        <a:font script="Lisu" typeface="Segoe UI"/>
+        <a:font script="Mymr" typeface="Myanmar Text"/>
+        <a:font script="Nkoo" typeface="Ebrima"/>
+        <a:font script="Olck" typeface="Nirmala UI"/>
+        <a:font script="Osma" typeface="Ebrima"/>
+        <a:font script="Phag" typeface="Phagspa"/>
+        <a:font script="Syrn" typeface="Estrangelo Edessa"/>
+        <a:font script="Syrj" typeface="Estrangelo Edessa"/>
+        <a:font script="Syre" typeface="Estrangelo Edessa"/>
+        <a:font script="Sora" typeface="Nirmala UI"/>
+        <a:font script="Tale" typeface="Microsoft Tai Le"/>
+        <a:font script="Talu" typeface="Microsoft New Tai Lue"/>
+        <a:font script="Tfng" typeface="Ebrima"/>
+      </a:majorFont>
+      <a:minorFont>
+        <a:latin typeface="Aptos" panose="02110004020202020204"/>
+        <a:ea typeface=""/>
+        <a:cs typeface=""/>
+        <a:font script="Jpan" typeface="游ゴシック"/>
+        <a:font script="Hang" typeface="맑은 고딕"/>
+        <a:font script="Hans" typeface="等线"/>
+        <a:font script="Hant" typeface="新細明體"/>
+        <a:font script="Arab" typeface="Arial"/>
+        <a:font script="Hebr" typeface="Arial"/>
+        <a:font script="Thai" typeface="Cordia New"/>
+        <a:font script="Ethi" typeface="Nyala"/>
+        <a:font script="Beng" typeface="Vrinda"/>
+        <a:font script="Gujr" typeface="Shruti"/>
+        <a:font script="Khmr" typeface="DaunPenh"/>
+        <a:font script="Knda" typeface="Tunga"/>
+        <a:font script="Guru" typeface="Raavi"/>
+        <a:font script="Cans" typeface="Euphemia"/>
+        <a:font script="Cher" typeface="Plantagenet Cherokee"/>
+        <a:font script="Yiii" typeface="Microsoft Yi Baiti"/>
+        <a:font script="Tibt" typeface="Microsoft Himalaya"/>
+        <a:font script="Thaa" typeface="MV Boli"/>
+        <a:font script="Deva" typeface="Mangal"/>
+        <a:font script="Telu" typeface="Gautami"/>
+        <a:font script="Taml" typeface="Latha"/>
+        <a:font script="Syrc" typeface="Estrangelo Edessa"/>
+        <a:font script="Orya" typeface="Kalinga"/>
+        <a:font script="Mlym" typeface="Kartika"/>
+        <a:font script="Laoo" typeface="DokChampa"/>
+        <a:font script="Sinh" typeface="Iskoola Pota"/>
+        <a:font script="Mong" typeface="Mongolian Baiti"/>
+        <a:font script="Viet" typeface="Arial"/>
+        <a:font script="Uigh" typeface="Microsoft Uighur"/>
+        <a:font script="Geor" typeface="Sylfaen"/>
+        <a:font script="Armn" typeface="Arial"/>
+        <a:font script="Bugi" typeface="Leelawadee UI"/>
+        <a:font script="Bopo" typeface="Microsoft JhengHei"/>
+        <a:font script="Java" typeface="Javanese Text"/>
+        <a:font script="Lisu" typeface="Segoe UI"/>
+        <a:font script="Mymr" typeface="Myanmar Text"/>
+        <a:font script="Nkoo" typeface="Ebrima"/>
+        <a:font script="Olck" typeface="Nirmala UI"/>
+        <a:font script="Osma" typeface="Ebrima"/>
+        <a:font script="Phag" typeface="Phagspa"/>
+        <a:font script="Syrn" typeface="Estrangelo Edessa"/>
+        <a:font script="Syrj" typeface="Estrangelo Edessa"/>
+        <a:font script="Syre" typeface="Estrangelo Edessa"/>
+        <a:font script="Sora" typeface="Nirmala UI"/>
+        <a:font script="Tale" typeface="Microsoft Tai Le"/>
+        <a:font script="Talu" typeface="Microsoft New Tai Lue"/>
+        <a:font script="Tfng" typeface="Ebrima"/>
+      </a:minorFont>
+    </a:fontScheme>
+    <a:fmtScheme name="Office">
+      <a:fillStyleLst>
+        <a:solidFill>
+          <a:schemeClr val="phClr"/>
+        </a:solidFill>
+        <a:gradFill rotWithShape="1">
+          <a:gsLst>
+            <a:gs pos="0">
+              <a:schemeClr val="phClr">
+                <a:lumMod val="110000"/>
+                <a:satMod val="105000"/>
+                <a:tint val="67000"/>
+              </a:schemeClr>
+            </a:gs>
+            <a:gs pos="50000">
+              <a:schemeClr val="phClr">
+                <a:lumMod val="105000"/>
+                <a:satMod val="103000"/>
+                <a:tint val="73000"/>
+              </a:schemeClr>
+            </a:gs>
+            <a:gs pos="100000">
+              <a:schemeClr val="phClr">
+                <a:lumMod val="105000"/>
+                <a:satMod val="109000"/>
+                <a:tint val="81000"/>
+              </a:schemeClr>
+            </a:gs>
+          </a:gsLst>
+          <a:lin ang="5400000" scaled="0"/>
+        </a:gradFill>
+        <a:gradFill rotWithShape="1">
+          <a:gsLst>
+            <a:gs pos="0">
+              <a:schemeClr val="phClr">
+                <a:satMod val="103000"/>
+                <a:lumMod val="102000"/>
+                <a:tint val="94000"/>
+              </a:schemeClr>
+            </a:gs>
+            <a:gs pos="50000">
+              <a:schemeClr val="phClr">
+                <a:satMod val="110000"/>
+                <a:lumMod val="100000"/>
+                <a:shade val="100000"/>
+              </a:schemeClr>
+            </a:gs>
+            <a:gs pos="100000">
+              <a:schemeClr val="phClr">
+                <a:lumMod val="99000"/>
+                <a:satMod val="120000"/>
+                <a:shade val="78000"/>
+              </a:schemeClr>
+            </a:gs>
+          </a:gsLst>
+          <a:lin ang="5400000" scaled="0"/>
+        </a:gradFill>
+      </a:fillStyleLst>
+      <a:lnStyleLst>
+        <a:ln w="12700" cap="flat" cmpd="sng" algn="ctr">
+          <a:solidFill>
+            <a:schemeClr val="phClr"/>
+          </a:solidFill>
+          <a:prstDash val="solid"/>
+          <a:miter lim="800000"/>
+        </a:ln>
+        <a:ln w="19050" cap="flat" cmpd="sng" algn="ctr">
+          <a:solidFill>
+            <a:schemeClr val="phClr"/>
+          </a:solidFill>
+          <a:prstDash val="solid"/>
+          <a:miter lim="800000"/>
+        </a:ln>
+        <a:ln w="25400" cap="flat" cmpd="sng" algn="ctr">
+          <a:solidFill>
+            <a:schemeClr val="phClr"/>
+          </a:solidFill>
+          <a:prstDash val="solid"/>
+          <a:miter lim="800000"/>
+        </a:ln>
+      </a:lnStyleLst>
+      <a:effectStyleLst>
+        <a:effectStyle>
+          <a:effectLst/>
+        </a:effectStyle>
+        <a:effectStyle>
+          <a:effectLst/>
+        </a:effectStyle>
+        <a:effectStyle>
+          <a:effectLst>
+            <a:outerShdw blurRad="57150" dist="19050" dir="5400000" algn="ctr" rotWithShape="0">
+              <a:srgbClr val="000000">
+                <a:alpha val="63000"/>
+              </a:srgbClr>
+            </a:outerShdw>
+          </a:effectLst>
+        </a:effectStyle>
+      </a:effectStyleLst>
+      <a:bgFillStyleLst>
+        <a:solidFill>
+          <a:schemeClr val="phClr"/>
+        </a:solidFill>
+        <a:solidFill>
+          <a:schemeClr val="phClr">
+            <a:tint val="95000"/>
+            <a:satMod val="170000"/>
+          </a:schemeClr>
+        </a:solidFill>
+        <a:gradFill rotWithShape="1">
+          <a:gsLst>
+            <a:gs pos="0">
+              <a:schemeClr val="phClr">
+                <a:tint val="93000"/>
+                <a:satMod val="150000"/>
+                <a:shade val="98000"/>
+                <a:lumMod val="102000"/>
+              </a:schemeClr>
+            </a:gs>
+            <a:gs pos="50000">
+              <a:schemeClr val="phClr">
+                <a:tint val="98000"/>
+                <a:satMod val="130000"/>
+                <a:shade val="90000"/>
+                <a:lumMod val="103000"/>
+              </a:schemeClr>
+            </a:gs>
+            <a:gs pos="100000">
+              <a:schemeClr val="phClr">
+                <a:shade val="63000"/>
+                <a:satMod val="120000"/>
+              </a:schemeClr>
+            </a:gs>
+          </a:gsLst>
+          <a:lin ang="5400000" scaled="0"/>
+        </a:gradFill>
+      </a:bgFillStyleLst>
+    </a:fmtScheme>
+  </a:themeElements>
+  <a:objectDefaults>
+    <a:lnDef>
+      <a:spPr/>
+      <a:bodyPr/>
+      <a:lstStyle/>
+      <a:style>
+        <a:lnRef idx="2">
+          <a:schemeClr val="accent1"/>
+        </a:lnRef>
+        <a:fillRef idx="0">
+          <a:schemeClr val="accent1"/>
+        </a:fillRef>
+        <a:effectRef idx="1">
+          <a:schemeClr val="accent1"/>
+        </a:effectRef>
+        <a:fontRef idx="minor">
+          <a:schemeClr val="tx1"/>
+        </a:fontRef>
+      </a:style>
+    </a:lnDef>
+  </a:objectDefaults>
+  <a:extraClrSchemeLst/>
+  <a:extLst>
+    <a:ext uri="{05A4C25C-085E-4340-85A3-A5531E510DB2}">
+      <thm15:themeFamily xmlns:thm15="http://schemas.microsoft.com/office/thememl/2012/main" name="Office Theme" id="{2E142A2C-CD16-42D6-873A-C26D2A0506FA}" vid="{1BDDFF52-6CD6-40A5-AB3C-68EB2F1E4D0A}"/>
+    </a:ext>
+  </a:extLst>
+</a:theme>
 </file>